--- a/IPv6.pptx
+++ b/IPv6.pptx
@@ -268,7 +268,7 @@
           <a:p>
             <a:fld id="{94F7A275-C2D3-4261-98C6-AB0830E022D0}" type="datetimeFigureOut">
               <a:rPr lang="de-DE" smtClean="0"/>
-              <a:t>03.01.2024</a:t>
+              <a:t>10.02.2026</a:t>
             </a:fld>
             <a:endParaRPr lang="de-DE"/>
           </a:p>
@@ -466,7 +466,7 @@
           <a:p>
             <a:fld id="{94F7A275-C2D3-4261-98C6-AB0830E022D0}" type="datetimeFigureOut">
               <a:rPr lang="de-DE" smtClean="0"/>
-              <a:t>03.01.2024</a:t>
+              <a:t>10.02.2026</a:t>
             </a:fld>
             <a:endParaRPr lang="de-DE"/>
           </a:p>
@@ -674,7 +674,7 @@
           <a:p>
             <a:fld id="{94F7A275-C2D3-4261-98C6-AB0830E022D0}" type="datetimeFigureOut">
               <a:rPr lang="de-DE" smtClean="0"/>
-              <a:t>03.01.2024</a:t>
+              <a:t>10.02.2026</a:t>
             </a:fld>
             <a:endParaRPr lang="de-DE"/>
           </a:p>
@@ -894,7 +894,7 @@
           <a:p>
             <a:fld id="{724FDD04-75BB-45C0-BB88-512E1A71469D}" type="datetimeFigureOut">
               <a:rPr lang="de-DE" smtClean="0"/>
-              <a:t>03.01.2024</a:t>
+              <a:t>10.02.2026</a:t>
             </a:fld>
             <a:endParaRPr lang="de-DE"/>
           </a:p>
@@ -1110,7 +1110,7 @@
           <a:p>
             <a:fld id="{724FDD04-75BB-45C0-BB88-512E1A71469D}" type="datetimeFigureOut">
               <a:rPr lang="de-DE" smtClean="0"/>
-              <a:t>03.01.2024</a:t>
+              <a:t>10.02.2026</a:t>
             </a:fld>
             <a:endParaRPr lang="de-DE"/>
           </a:p>
@@ -1385,7 +1385,7 @@
           <a:p>
             <a:fld id="{724FDD04-75BB-45C0-BB88-512E1A71469D}" type="datetimeFigureOut">
               <a:rPr lang="de-DE" smtClean="0"/>
-              <a:t>03.01.2024</a:t>
+              <a:t>10.02.2026</a:t>
             </a:fld>
             <a:endParaRPr lang="de-DE"/>
           </a:p>
@@ -1650,7 +1650,7 @@
           <a:p>
             <a:fld id="{724FDD04-75BB-45C0-BB88-512E1A71469D}" type="datetimeFigureOut">
               <a:rPr lang="de-DE" smtClean="0"/>
-              <a:t>03.01.2024</a:t>
+              <a:t>10.02.2026</a:t>
             </a:fld>
             <a:endParaRPr lang="de-DE"/>
           </a:p>
@@ -2062,7 +2062,7 @@
           <a:p>
             <a:fld id="{724FDD04-75BB-45C0-BB88-512E1A71469D}" type="datetimeFigureOut">
               <a:rPr lang="de-DE" smtClean="0"/>
-              <a:t>03.01.2024</a:t>
+              <a:t>10.02.2026</a:t>
             </a:fld>
             <a:endParaRPr lang="de-DE"/>
           </a:p>
@@ -2203,7 +2203,7 @@
           <a:p>
             <a:fld id="{724FDD04-75BB-45C0-BB88-512E1A71469D}" type="datetimeFigureOut">
               <a:rPr lang="de-DE" smtClean="0"/>
-              <a:t>03.01.2024</a:t>
+              <a:t>10.02.2026</a:t>
             </a:fld>
             <a:endParaRPr lang="de-DE"/>
           </a:p>
@@ -2316,7 +2316,7 @@
           <a:p>
             <a:fld id="{724FDD04-75BB-45C0-BB88-512E1A71469D}" type="datetimeFigureOut">
               <a:rPr lang="de-DE" smtClean="0"/>
-              <a:t>03.01.2024</a:t>
+              <a:t>10.02.2026</a:t>
             </a:fld>
             <a:endParaRPr lang="de-DE"/>
           </a:p>
@@ -2627,7 +2627,7 @@
           <a:p>
             <a:fld id="{724FDD04-75BB-45C0-BB88-512E1A71469D}" type="datetimeFigureOut">
               <a:rPr lang="de-DE" smtClean="0"/>
-              <a:t>03.01.2024</a:t>
+              <a:t>10.02.2026</a:t>
             </a:fld>
             <a:endParaRPr lang="de-DE"/>
           </a:p>
@@ -2825,7 +2825,7 @@
           <a:p>
             <a:fld id="{94F7A275-C2D3-4261-98C6-AB0830E022D0}" type="datetimeFigureOut">
               <a:rPr lang="de-DE" smtClean="0"/>
-              <a:t>03.01.2024</a:t>
+              <a:t>10.02.2026</a:t>
             </a:fld>
             <a:endParaRPr lang="de-DE"/>
           </a:p>
@@ -3113,7 +3113,7 @@
           <a:p>
             <a:fld id="{724FDD04-75BB-45C0-BB88-512E1A71469D}" type="datetimeFigureOut">
               <a:rPr lang="de-DE" smtClean="0"/>
-              <a:t>03.01.2024</a:t>
+              <a:t>10.02.2026</a:t>
             </a:fld>
             <a:endParaRPr lang="de-DE"/>
           </a:p>
@@ -3311,7 +3311,7 @@
           <a:p>
             <a:fld id="{724FDD04-75BB-45C0-BB88-512E1A71469D}" type="datetimeFigureOut">
               <a:rPr lang="de-DE" smtClean="0"/>
-              <a:t>03.01.2024</a:t>
+              <a:t>10.02.2026</a:t>
             </a:fld>
             <a:endParaRPr lang="de-DE"/>
           </a:p>
@@ -3519,7 +3519,7 @@
           <a:p>
             <a:fld id="{724FDD04-75BB-45C0-BB88-512E1A71469D}" type="datetimeFigureOut">
               <a:rPr lang="de-DE" smtClean="0"/>
-              <a:t>03.01.2024</a:t>
+              <a:t>10.02.2026</a:t>
             </a:fld>
             <a:endParaRPr lang="de-DE"/>
           </a:p>
@@ -3794,7 +3794,7 @@
           <a:p>
             <a:fld id="{94F7A275-C2D3-4261-98C6-AB0830E022D0}" type="datetimeFigureOut">
               <a:rPr lang="de-DE" smtClean="0"/>
-              <a:t>03.01.2024</a:t>
+              <a:t>10.02.2026</a:t>
             </a:fld>
             <a:endParaRPr lang="de-DE"/>
           </a:p>
@@ -4059,7 +4059,7 @@
           <a:p>
             <a:fld id="{94F7A275-C2D3-4261-98C6-AB0830E022D0}" type="datetimeFigureOut">
               <a:rPr lang="de-DE" smtClean="0"/>
-              <a:t>03.01.2024</a:t>
+              <a:t>10.02.2026</a:t>
             </a:fld>
             <a:endParaRPr lang="de-DE"/>
           </a:p>
@@ -4471,7 +4471,7 @@
           <a:p>
             <a:fld id="{94F7A275-C2D3-4261-98C6-AB0830E022D0}" type="datetimeFigureOut">
               <a:rPr lang="de-DE" smtClean="0"/>
-              <a:t>03.01.2024</a:t>
+              <a:t>10.02.2026</a:t>
             </a:fld>
             <a:endParaRPr lang="de-DE"/>
           </a:p>
@@ -4612,7 +4612,7 @@
           <a:p>
             <a:fld id="{94F7A275-C2D3-4261-98C6-AB0830E022D0}" type="datetimeFigureOut">
               <a:rPr lang="de-DE" smtClean="0"/>
-              <a:t>03.01.2024</a:t>
+              <a:t>10.02.2026</a:t>
             </a:fld>
             <a:endParaRPr lang="de-DE"/>
           </a:p>
@@ -4725,7 +4725,7 @@
           <a:p>
             <a:fld id="{94F7A275-C2D3-4261-98C6-AB0830E022D0}" type="datetimeFigureOut">
               <a:rPr lang="de-DE" smtClean="0"/>
-              <a:t>03.01.2024</a:t>
+              <a:t>10.02.2026</a:t>
             </a:fld>
             <a:endParaRPr lang="de-DE"/>
           </a:p>
@@ -5036,7 +5036,7 @@
           <a:p>
             <a:fld id="{94F7A275-C2D3-4261-98C6-AB0830E022D0}" type="datetimeFigureOut">
               <a:rPr lang="de-DE" smtClean="0"/>
-              <a:t>03.01.2024</a:t>
+              <a:t>10.02.2026</a:t>
             </a:fld>
             <a:endParaRPr lang="de-DE"/>
           </a:p>
@@ -5324,7 +5324,7 @@
           <a:p>
             <a:fld id="{94F7A275-C2D3-4261-98C6-AB0830E022D0}" type="datetimeFigureOut">
               <a:rPr lang="de-DE" smtClean="0"/>
-              <a:t>03.01.2024</a:t>
+              <a:t>10.02.2026</a:t>
             </a:fld>
             <a:endParaRPr lang="de-DE"/>
           </a:p>
@@ -5565,7 +5565,7 @@
           <a:p>
             <a:fld id="{94F7A275-C2D3-4261-98C6-AB0830E022D0}" type="datetimeFigureOut">
               <a:rPr lang="de-DE" smtClean="0"/>
-              <a:t>03.01.2024</a:t>
+              <a:t>10.02.2026</a:t>
             </a:fld>
             <a:endParaRPr lang="de-DE"/>
           </a:p>
@@ -6133,7 +6133,7 @@
           <a:p>
             <a:fld id="{724FDD04-75BB-45C0-BB88-512E1A71469D}" type="datetimeFigureOut">
               <a:rPr lang="de-DE" smtClean="0"/>
-              <a:t>03.01.2024</a:t>
+              <a:t>10.02.2026</a:t>
             </a:fld>
             <a:endParaRPr lang="de-DE"/>
           </a:p>
@@ -6765,7 +6765,7 @@
                 <a:effectLst/>
                 <a:latin typeface="Helvetica Neue"/>
               </a:rPr>
-              <a:t>Eine IPv6-Adresse (OSI Layer 3) besteht aus 128 Bit (16 </a:t>
+              <a:t>Eine IPv6-Adresse (OSI-Layer 3) besteht aus 128 Bit (16 </a:t>
             </a:r>
             <a:r>
               <a:rPr lang="de-DE" dirty="0">
@@ -8396,7 +8396,7 @@
               <a:t>IPv6 hat für Broadcast eine feste IP (</a:t>
             </a:r>
             <a:r>
-              <a:rPr lang="de-DE" b="1" dirty="0">
+              <a:rPr lang="de-DE" sz="3000" b="1" dirty="0">
                 <a:solidFill>
                   <a:srgbClr val="2B2B2B"/>
                 </a:solidFill>
@@ -9319,7 +9319,7 @@
             <p:ph idx="1"/>
             <p:extLst>
               <p:ext uri="{D42A27DB-BD31-4B8C-83A1-F6EECF244321}">
-                <p14:modId xmlns:p14="http://schemas.microsoft.com/office/powerpoint/2010/main" val="641401565"/>
+                <p14:modId xmlns:p14="http://schemas.microsoft.com/office/powerpoint/2010/main" val="4015795643"/>
               </p:ext>
             </p:extLst>
           </p:nvPr>
@@ -9494,31 +9494,7 @@
                           <a:ea typeface="+mn-ea"/>
                           <a:cs typeface="+mn-cs"/>
                         </a:rPr>
-                        <a:t>Link </a:t>
-                      </a:r>
-                      <a:r>
-                        <a:rPr lang="de-DE" sz="1400" b="1" i="0" kern="1200" dirty="0" err="1">
-                          <a:solidFill>
-                            <a:schemeClr val="dk1"/>
-                          </a:solidFill>
-                          <a:effectLst/>
-                          <a:latin typeface="+mn-lt"/>
-                          <a:ea typeface="+mn-ea"/>
-                          <a:cs typeface="+mn-cs"/>
-                        </a:rPr>
-                        <a:t>Local</a:t>
-                      </a:r>
-                      <a:r>
-                        <a:rPr lang="de-DE" sz="1400" b="1" i="0" kern="1200" dirty="0">
-                          <a:solidFill>
-                            <a:schemeClr val="dk1"/>
-                          </a:solidFill>
-                          <a:effectLst/>
-                          <a:latin typeface="+mn-lt"/>
-                          <a:ea typeface="+mn-ea"/>
-                          <a:cs typeface="+mn-cs"/>
-                        </a:rPr>
-                        <a:t> </a:t>
+                        <a:t>Link Locale </a:t>
                       </a:r>
                       <a:r>
                         <a:rPr lang="de-DE" sz="1400" b="1" i="0" kern="1200" dirty="0" err="1">
